--- a/Link_for_CosmosDB.pptx
+++ b/Link_for_CosmosDB.pptx
@@ -260,7 +260,7 @@
           <a:p>
             <a:fld id="{C3D1CD5E-42B2-400A-8507-848E2C61D324}" type="datetimeFigureOut">
               <a:rPr lang="en-US" smtClean="0"/>
-              <a:t>7/11/21</a:t>
+              <a:t>7/13/21</a:t>
             </a:fld>
             <a:endParaRPr lang="en-US"/>
           </a:p>
@@ -458,7 +458,7 @@
           <a:p>
             <a:fld id="{C3D1CD5E-42B2-400A-8507-848E2C61D324}" type="datetimeFigureOut">
               <a:rPr lang="en-US" smtClean="0"/>
-              <a:t>7/11/21</a:t>
+              <a:t>7/13/21</a:t>
             </a:fld>
             <a:endParaRPr lang="en-US"/>
           </a:p>
@@ -666,7 +666,7 @@
           <a:p>
             <a:fld id="{C3D1CD5E-42B2-400A-8507-848E2C61D324}" type="datetimeFigureOut">
               <a:rPr lang="en-US" smtClean="0"/>
-              <a:t>7/11/21</a:t>
+              <a:t>7/13/21</a:t>
             </a:fld>
             <a:endParaRPr lang="en-US"/>
           </a:p>
@@ -864,7 +864,7 @@
           <a:p>
             <a:fld id="{C3D1CD5E-42B2-400A-8507-848E2C61D324}" type="datetimeFigureOut">
               <a:rPr lang="en-US" smtClean="0"/>
-              <a:t>7/11/21</a:t>
+              <a:t>7/13/21</a:t>
             </a:fld>
             <a:endParaRPr lang="en-US"/>
           </a:p>
@@ -1139,7 +1139,7 @@
           <a:p>
             <a:fld id="{C3D1CD5E-42B2-400A-8507-848E2C61D324}" type="datetimeFigureOut">
               <a:rPr lang="en-US" smtClean="0"/>
-              <a:t>7/11/21</a:t>
+              <a:t>7/13/21</a:t>
             </a:fld>
             <a:endParaRPr lang="en-US"/>
           </a:p>
@@ -1404,7 +1404,7 @@
           <a:p>
             <a:fld id="{C3D1CD5E-42B2-400A-8507-848E2C61D324}" type="datetimeFigureOut">
               <a:rPr lang="en-US" smtClean="0"/>
-              <a:t>7/11/21</a:t>
+              <a:t>7/13/21</a:t>
             </a:fld>
             <a:endParaRPr lang="en-US"/>
           </a:p>
@@ -1816,7 +1816,7 @@
           <a:p>
             <a:fld id="{C3D1CD5E-42B2-400A-8507-848E2C61D324}" type="datetimeFigureOut">
               <a:rPr lang="en-US" smtClean="0"/>
-              <a:t>7/11/21</a:t>
+              <a:t>7/13/21</a:t>
             </a:fld>
             <a:endParaRPr lang="en-US"/>
           </a:p>
@@ -1957,7 +1957,7 @@
           <a:p>
             <a:fld id="{C3D1CD5E-42B2-400A-8507-848E2C61D324}" type="datetimeFigureOut">
               <a:rPr lang="en-US" smtClean="0"/>
-              <a:t>7/11/21</a:t>
+              <a:t>7/13/21</a:t>
             </a:fld>
             <a:endParaRPr lang="en-US"/>
           </a:p>
@@ -2070,7 +2070,7 @@
           <a:p>
             <a:fld id="{C3D1CD5E-42B2-400A-8507-848E2C61D324}" type="datetimeFigureOut">
               <a:rPr lang="en-US" smtClean="0"/>
-              <a:t>7/11/21</a:t>
+              <a:t>7/13/21</a:t>
             </a:fld>
             <a:endParaRPr lang="en-US"/>
           </a:p>
@@ -2381,7 +2381,7 @@
           <a:p>
             <a:fld id="{C3D1CD5E-42B2-400A-8507-848E2C61D324}" type="datetimeFigureOut">
               <a:rPr lang="en-US" smtClean="0"/>
-              <a:t>7/11/21</a:t>
+              <a:t>7/13/21</a:t>
             </a:fld>
             <a:endParaRPr lang="en-US"/>
           </a:p>
@@ -2669,7 +2669,7 @@
           <a:p>
             <a:fld id="{C3D1CD5E-42B2-400A-8507-848E2C61D324}" type="datetimeFigureOut">
               <a:rPr lang="en-US" smtClean="0"/>
-              <a:t>7/11/21</a:t>
+              <a:t>7/13/21</a:t>
             </a:fld>
             <a:endParaRPr lang="en-US"/>
           </a:p>
@@ -2910,7 +2910,7 @@
           <a:p>
             <a:fld id="{C3D1CD5E-42B2-400A-8507-848E2C61D324}" type="datetimeFigureOut">
               <a:rPr lang="en-US" smtClean="0"/>
-              <a:t>7/11/21</a:t>
+              <a:t>7/13/21</a:t>
             </a:fld>
             <a:endParaRPr lang="en-US"/>
           </a:p>
@@ -4878,7 +4878,7 @@
         <p:spPr>
           <a:xfrm>
             <a:off x="0" y="479503"/>
-            <a:ext cx="6266985" cy="5909310"/>
+            <a:ext cx="6266985" cy="6124754"/>
           </a:xfrm>
           <a:prstGeom prst="rect">
             <a:avLst/>
@@ -5061,7 +5061,7 @@
               <a:rPr lang="en-US" sz="1400" dirty="0">
                 <a:hlinkClick r:id="rId5"/>
               </a:rPr>
-              <a:t>https://docs.microsoft.com/en-us/azure/cosmos-db/synapse-link</a:t>
+              <a:t>https://docs.microsoft.com/en-us/azure/cosmos-db/analytical-store-introduction</a:t>
             </a:r>
             <a:r>
               <a:rPr lang="en-US" sz="1400" dirty="0"/>
@@ -5076,6 +5076,22 @@
             <a:r>
               <a:rPr lang="en-US" sz="1400" dirty="0">
                 <a:hlinkClick r:id="rId6"/>
+              </a:rPr>
+              <a:t>https://docs.microsoft.com/en-us/azure/cosmos-db/synapse-link</a:t>
+            </a:r>
+            <a:r>
+              <a:rPr lang="en-US" sz="1400" dirty="0"/>
+              <a:t> </a:t>
+            </a:r>
+          </a:p>
+          <a:p>
+            <a:r>
+              <a:rPr lang="en-US" sz="1400" dirty="0"/>
+              <a:t> - </a:t>
+            </a:r>
+            <a:r>
+              <a:rPr lang="en-US" sz="1400" dirty="0">
+                <a:hlinkClick r:id="rId7"/>
               </a:rPr>
               <a:t>https://docs.microsoft.com/en-us/azure/cosmos-db/configure-synapse-link</a:t>
             </a:r>
@@ -5179,7 +5195,7 @@
             </a:r>
             <a:r>
               <a:rPr lang="en-US" sz="1400" dirty="0">
-                <a:hlinkClick r:id="rId7"/>
+                <a:hlinkClick r:id="rId8"/>
               </a:rPr>
               <a:t>https://www.linkedin.com/pulse/how-select-proper-data-backend-technology-azure-andrei-zaichikov/</a:t>
             </a:r>
@@ -5220,47 +5236,30 @@
             <a:r>
               <a:rPr lang="en-US" sz="1400" dirty="0"/>
               <a:t>   - </a:t>
-            </a:r>
-            <a:r>
-              <a:rPr lang="en-US" sz="1400" dirty="0">
-                <a:hlinkClick r:id="rId8"/>
-              </a:rPr>
-              <a:t>https://www.linkedin.com/in/zaychikov/</a:t>
-            </a:r>
-            <a:r>
-              <a:rPr lang="en-US" sz="1400" dirty="0"/>
-              <a:t> </a:t>
-            </a:r>
-            <a:br>
-              <a:rPr lang="en-US" sz="1400" dirty="0"/>
-            </a:br>
-            <a:endParaRPr lang="en-US" sz="1400" dirty="0"/>
-          </a:p>
-          <a:p>
-            <a:r>
-              <a:rPr lang="en-US" sz="1400" dirty="0"/>
-              <a:t>   Aleksey </a:t>
-            </a:r>
-            <a:r>
-              <a:rPr lang="en-US" sz="1400" dirty="0" err="1"/>
-              <a:t>Savateyev</a:t>
-            </a:r>
-            <a:r>
-              <a:rPr lang="en-US" sz="1400" dirty="0"/>
-              <a:t> </a:t>
-            </a:r>
-            <a:br>
-              <a:rPr lang="en-US" sz="1400" dirty="0"/>
-            </a:br>
-            <a:r>
-              <a:rPr lang="en-US" sz="1400" dirty="0"/>
-              <a:t>     - </a:t>
             </a:r>
             <a:r>
               <a:rPr lang="en-US" sz="1400" dirty="0">
                 <a:hlinkClick r:id="rId9"/>
               </a:rPr>
-              <a:t>https://www.linkedin.com/in/aleksey-s-7b0918/</a:t>
+              <a:t>https://www.linkedin.com/in/zaychikov/</a:t>
+            </a:r>
+            <a:r>
+              <a:rPr lang="en-US" sz="1400" dirty="0"/>
+              <a:t> </a:t>
+            </a:r>
+            <a:br>
+              <a:rPr lang="en-US" sz="1400" dirty="0"/>
+            </a:br>
+            <a:endParaRPr lang="en-US" sz="1400" dirty="0"/>
+          </a:p>
+          <a:p>
+            <a:r>
+              <a:rPr lang="en-US" sz="1400" dirty="0"/>
+              <a:t>   Aleksey </a:t>
+            </a:r>
+            <a:r>
+              <a:rPr lang="en-US" sz="1400" dirty="0" err="1"/>
+              <a:t>Savateyev</a:t>
             </a:r>
             <a:r>
               <a:rPr lang="en-US" sz="1400" dirty="0"/>
@@ -5277,7 +5276,7 @@
               <a:rPr lang="en-US" sz="1400" dirty="0">
                 <a:hlinkClick r:id="rId10"/>
               </a:rPr>
-              <a:t>https://www.youtube.com/watch?v=8RiHSDf7xBs</a:t>
+              <a:t>https://www.linkedin.com/in/aleksey-s-7b0918/</a:t>
             </a:r>
             <a:r>
               <a:rPr lang="en-US" sz="1400" dirty="0"/>
@@ -5294,7 +5293,7 @@
               <a:rPr lang="en-US" sz="1400" dirty="0">
                 <a:hlinkClick r:id="rId11"/>
               </a:rPr>
-              <a:t>https://azure.microsoft.com/en-us/blog/gain-insight-into-your-azure-cosmos-db-data-with-qlik-view-and-qlik-sense/</a:t>
+              <a:t>https://www.youtube.com/watch?v=8RiHSDf7xBs</a:t>
             </a:r>
             <a:r>
               <a:rPr lang="en-US" sz="1400" dirty="0"/>
@@ -5303,32 +5302,15 @@
             <a:br>
               <a:rPr lang="en-US" sz="1400" dirty="0"/>
             </a:br>
-            <a:endParaRPr lang="en-US" sz="1400" dirty="0"/>
-          </a:p>
-          <a:p>
-            <a:r>
-              <a:rPr lang="en-US" sz="1400" dirty="0"/>
-              <a:t>   Kirill </a:t>
-            </a:r>
-            <a:r>
-              <a:rPr lang="en-US" sz="1400" dirty="0" err="1"/>
-              <a:t>Gavrylyuk</a:t>
-            </a:r>
-            <a:r>
-              <a:rPr lang="en-US" sz="1400" dirty="0"/>
-              <a:t> - director of Cosmos DB development:</a:t>
-            </a:r>
-          </a:p>
-          <a:p>
-            <a:r>
-              <a:rPr lang="en-US" sz="1400" dirty="0"/>
-              <a:t>     - </a:t>
+            <a:r>
+              <a:rPr lang="en-US" sz="1400" dirty="0"/>
+              <a:t>     - </a:t>
             </a:r>
             <a:r>
               <a:rPr lang="en-US" sz="1400" dirty="0">
                 <a:hlinkClick r:id="rId12"/>
               </a:rPr>
-              <a:t>https://www.linkedin.com/in/kirillgavrylyuk/</a:t>
+              <a:t>https://azure.microsoft.com/en-us/blog/gain-insight-into-your-azure-cosmos-db-data-with-qlik-view-and-qlik-sense/</a:t>
             </a:r>
             <a:r>
               <a:rPr lang="en-US" sz="1400" dirty="0"/>
@@ -5337,6 +5319,23 @@
             <a:br>
               <a:rPr lang="en-US" sz="1400" dirty="0"/>
             </a:br>
+            <a:endParaRPr lang="en-US" sz="1400" dirty="0"/>
+          </a:p>
+          <a:p>
+            <a:r>
+              <a:rPr lang="en-US" sz="1400" dirty="0"/>
+              <a:t>   Kirill </a:t>
+            </a:r>
+            <a:r>
+              <a:rPr lang="en-US" sz="1400" dirty="0" err="1"/>
+              <a:t>Gavrylyuk</a:t>
+            </a:r>
+            <a:r>
+              <a:rPr lang="en-US" sz="1400" dirty="0"/>
+              <a:t> - director of Cosmos DB development:</a:t>
+            </a:r>
+          </a:p>
+          <a:p>
             <a:r>
               <a:rPr lang="en-US" sz="1400" dirty="0"/>
               <a:t>     - </a:t>
@@ -5345,7 +5344,7 @@
               <a:rPr lang="en-US" sz="1400" dirty="0">
                 <a:hlinkClick r:id="rId13"/>
               </a:rPr>
-              <a:t>https://www.youtube.com/watch?v=27SN1eyVn5k</a:t>
+              <a:t>https://www.linkedin.com/in/kirillgavrylyuk/</a:t>
             </a:r>
             <a:r>
               <a:rPr lang="en-US" sz="1400" dirty="0"/>
@@ -5362,7 +5361,7 @@
               <a:rPr lang="en-US" sz="1400" dirty="0">
                 <a:hlinkClick r:id="rId14"/>
               </a:rPr>
-              <a:t>https://www.youtube.com/watch?v=2gydxodDS_I</a:t>
+              <a:t>https://www.youtube.com/watch?v=27SN1eyVn5k</a:t>
             </a:r>
             <a:r>
               <a:rPr lang="en-US" sz="1400" dirty="0"/>
@@ -5378,6 +5377,23 @@
             <a:r>
               <a:rPr lang="en-US" sz="1400" dirty="0">
                 <a:hlinkClick r:id="rId15"/>
+              </a:rPr>
+              <a:t>https://www.youtube.com/watch?v=2gydxodDS_I</a:t>
+            </a:r>
+            <a:r>
+              <a:rPr lang="en-US" sz="1400" dirty="0"/>
+              <a:t> </a:t>
+            </a:r>
+            <a:br>
+              <a:rPr lang="en-US" sz="1400" dirty="0"/>
+            </a:br>
+            <a:r>
+              <a:rPr lang="en-US" sz="1400" dirty="0"/>
+              <a:t>     - </a:t>
+            </a:r>
+            <a:r>
+              <a:rPr lang="en-US" sz="1400" dirty="0">
+                <a:hlinkClick r:id="rId16"/>
               </a:rPr>
               <a:t>https://www.youtube.com/watch?v=rIjH24x19pQ</a:t>
             </a:r>
